--- a/catalog/samples/claim_panel_figure.pptx
+++ b/catalog/samples/claim_panel_figure.pptx
@@ -1372,7 +1372,7 @@
           </a:p>
           <a:p>
             <a:r>
-              <a:t>  "template_sha256": "ef61971e3d500547959d9143d0fe7546b4af34ef45885ae65d5062c06ca3d1de"</a:t>
+              <a:t>  "template_sha256": "32d2015000b9c8e922ade929c3bd75ff58b135e72afc79f6f4f286d040ecba45"</a:t>
             </a:r>
           </a:p>
           <a:p>
